--- a/Presentation/powerpoint.pptx
+++ b/Presentation/powerpoint.pptx
@@ -11,7 +11,7 @@
     <p:sldId id="2962" r:id="rId2"/>
     <p:sldId id="2949" r:id="rId3"/>
     <p:sldId id="2982" r:id="rId4"/>
-    <p:sldId id="2951" r:id="rId5"/>
+    <p:sldId id="2993" r:id="rId5"/>
     <p:sldId id="2952" r:id="rId6"/>
     <p:sldId id="2953" r:id="rId7"/>
     <p:sldId id="2983" r:id="rId8"/>
@@ -9944,7 +9944,7 @@
         <p:spPr>
           <a:xfrm>
             <a:off x="985519" y="5486400"/>
-            <a:ext cx="6731000" cy="698500"/>
+            <a:ext cx="6443981" cy="698500"/>
           </a:xfrm>
           <a:prstGeom prst="rect">
             <a:avLst/>
@@ -9974,7 +9974,7 @@
             <a:r>
               <a:rPr lang="id-ID" sz="1700" b="1" dirty="0">
                 <a:solidFill>
-                  <a:srgbClr val="FFFFFF"/>
+                  <a:srgbClr val="1F4E79"/>
                 </a:solidFill>
               </a:rPr>
               <a:t>Apakah kesenjangan ini bersifat temporer (akibat pandemi) atau struktural (stabil lintas waktu)?</a:t>
@@ -10314,8 +10314,8 @@
         </p:nvSpPr>
         <p:spPr>
           <a:xfrm>
-            <a:off x="731520" y="1066800"/>
-            <a:ext cx="10901680" cy="381000"/>
+            <a:off x="508000" y="1168400"/>
+            <a:ext cx="10896600" cy="304800"/>
           </a:xfrm>
           <a:prstGeom prst="rect">
             <a:avLst/>
@@ -10330,7 +10330,7 @@
               <a:buNone/>
             </a:pPr>
             <a:r>
-              <a:rPr lang="id-ID" sz="1500" b="1" dirty="0">
+              <a:rPr lang="id-ID" sz="1600" b="1" dirty="0">
                 <a:solidFill>
                   <a:srgbClr val="C8A951"/>
                 </a:solidFill>
@@ -10342,49 +10342,117 @@
       </p:sp>
       <p:sp>
         <p:nvSpPr>
-          <p:cNvPr id="107" name="RQ1Bg"/>
-          <p:cNvSpPr/>
-          <p:nvPr/>
-        </p:nvSpPr>
-        <p:spPr>
-          <a:xfrm>
-            <a:off x="731520" y="1524000"/>
-            <a:ext cx="5212080" cy="1778000"/>
-          </a:xfrm>
-          <a:prstGeom prst="rect">
-            <a:avLst/>
-          </a:prstGeom>
-          <a:solidFill>
-            <a:srgbClr val="F7F4ED"/>
+          <p:cNvPr id="115" name="ObjHeader"/>
+          <p:cNvSpPr txBox="1"/>
+          <p:nvPr/>
+        </p:nvSpPr>
+        <p:spPr>
+          <a:xfrm>
+            <a:off x="508000" y="3788228"/>
+            <a:ext cx="10896600" cy="304800"/>
+          </a:xfrm>
+          <a:prstGeom prst="rect">
+            <a:avLst/>
+          </a:prstGeom>
+          <a:noFill/>
+        </p:spPr>
+        <p:txBody>
+          <a:bodyPr wrap="square" lIns="0" tIns="0" rIns="0" bIns="0" anchor="t"/>
+          <a:lstStyle/>
+          <a:p>
+            <a:pPr algn="l">
+              <a:buNone/>
+            </a:pPr>
+            <a:r>
+              <a:rPr lang="id-ID" sz="1600" b="1" dirty="0">
+                <a:solidFill>
+                  <a:srgbClr val="C8A951"/>
+                </a:solidFill>
+              </a:rPr>
+              <a:t>TUJUAN PENELITIAN</a:t>
+            </a:r>
+          </a:p>
+        </p:txBody>
+      </p:sp>
+      <p:sp>
+        <p:nvSpPr>
+          <p:cNvPr id="103" name="PageNum"/>
+          <p:cNvSpPr txBox="1"/>
+          <p:nvPr/>
+        </p:nvSpPr>
+        <p:spPr>
+          <a:xfrm>
+            <a:off x="10541000" y="6540500"/>
+            <a:ext cx="1397000" cy="279400"/>
+          </a:xfrm>
+          <a:prstGeom prst="rect">
+            <a:avLst/>
+          </a:prstGeom>
+          <a:noFill/>
+        </p:spPr>
+        <p:txBody>
+          <a:bodyPr wrap="square" lIns="0" tIns="0" rIns="0" bIns="0" anchor="ctr" anchorCtr="0"/>
+          <a:lstStyle/>
+          <a:p>
+            <a:pPr algn="r">
+              <a:buNone/>
+            </a:pPr>
+            <a:r>
+              <a:rPr lang="en-US" sz="1200" dirty="0">
+                <a:solidFill>
+                  <a:srgbClr val="C8A951"/>
+                </a:solidFill>
+              </a:rPr>
+              <a:t>04 / 15</a:t>
+            </a:r>
+          </a:p>
+        </p:txBody>
+      </p:sp>
+      <p:sp>
+        <p:nvSpPr>
+          <p:cNvPr id="200" name="Card200Bg"/>
+          <p:cNvSpPr/>
+          <p:nvPr/>
+        </p:nvSpPr>
+        <p:spPr>
+          <a:xfrm>
+            <a:off x="508000" y="1524000"/>
+            <a:ext cx="1756229" cy="2057400"/>
+          </a:xfrm>
+          <a:prstGeom prst="rect">
+            <a:avLst/>
+          </a:prstGeom>
+          <a:solidFill>
+            <a:srgbClr val="F2EEE6"/>
           </a:solidFill>
           <a:ln>
             <a:noFill/>
           </a:ln>
         </p:spPr>
         <p:txBody>
-          <a:bodyPr/>
-          <a:lstStyle/>
-          <a:p>
-            <a:endParaRPr/>
-          </a:p>
-        </p:txBody>
-      </p:sp>
-      <p:sp>
-        <p:nvSpPr>
-          <p:cNvPr id="108" name="RQ1Edge"/>
-          <p:cNvSpPr/>
-          <p:nvPr/>
-        </p:nvSpPr>
-        <p:spPr>
-          <a:xfrm>
-            <a:off x="731520" y="1524000"/>
-            <a:ext cx="63500" cy="1778000"/>
-          </a:xfrm>
-          <a:prstGeom prst="rect">
-            <a:avLst/>
-          </a:prstGeom>
-          <a:solidFill>
-            <a:srgbClr val="003366"/>
+          <a:bodyPr wrap="square" anchor="t"/>
+          <a:lstStyle/>
+          <a:p>
+            <a:endParaRPr lang="en-US"/>
+          </a:p>
+        </p:txBody>
+      </p:sp>
+      <p:sp>
+        <p:nvSpPr>
+          <p:cNvPr id="201" name="Card200Edge"/>
+          <p:cNvSpPr/>
+          <p:nvPr/>
+        </p:nvSpPr>
+        <p:spPr>
+          <a:xfrm>
+            <a:off x="508000" y="1524000"/>
+            <a:ext cx="45719" cy="2057400"/>
+          </a:xfrm>
+          <a:prstGeom prst="rect">
+            <a:avLst/>
+          </a:prstGeom>
+          <a:solidFill>
+            <a:srgbClr val="C8A951"/>
           </a:solidFill>
           <a:ln>
             <a:noFill/>
@@ -10394,20 +10462,56 @@
           <a:bodyPr/>
           <a:lstStyle/>
           <a:p>
-            <a:endParaRPr/>
-          </a:p>
-        </p:txBody>
-      </p:sp>
-      <p:sp>
-        <p:nvSpPr>
-          <p:cNvPr id="109" name="RQ1Num"/>
-          <p:cNvSpPr txBox="1"/>
-          <p:nvPr/>
-        </p:nvSpPr>
-        <p:spPr>
-          <a:xfrm>
-            <a:off x="985519" y="1676400"/>
-            <a:ext cx="762000" cy="381000"/>
+            <a:endParaRPr lang="en-US"/>
+          </a:p>
+        </p:txBody>
+      </p:sp>
+      <p:sp>
+        <p:nvSpPr>
+          <p:cNvPr id="202" name="Card200Num"/>
+          <p:cNvSpPr txBox="1"/>
+          <p:nvPr/>
+        </p:nvSpPr>
+        <p:spPr>
+          <a:xfrm>
+            <a:off x="660400" y="1651000"/>
+            <a:ext cx="1600120" cy="276999"/>
+          </a:xfrm>
+          <a:prstGeom prst="rect">
+            <a:avLst/>
+          </a:prstGeom>
+          <a:noFill/>
+        </p:spPr>
+        <p:txBody>
+          <a:bodyPr wrap="square" lIns="0" tIns="0" rIns="0" bIns="0" anchor="t">
+            <a:spAutoFit/>
+          </a:bodyPr>
+          <a:lstStyle/>
+          <a:p>
+            <a:pPr algn="l">
+              <a:buNone/>
+            </a:pPr>
+            <a:r>
+              <a:rPr lang="en-US" sz="1800" b="1" dirty="0">
+                <a:solidFill>
+                  <a:srgbClr val="C8A951"/>
+                </a:solidFill>
+              </a:rPr>
+              <a:t>RQ1</a:t>
+            </a:r>
+          </a:p>
+        </p:txBody>
+      </p:sp>
+      <p:sp>
+        <p:nvSpPr>
+          <p:cNvPr id="203" name="Card200Text"/>
+          <p:cNvSpPr txBox="1"/>
+          <p:nvPr/>
+        </p:nvSpPr>
+        <p:spPr>
+          <a:xfrm>
+            <a:off x="660400" y="2082800"/>
+            <a:ext cx="1561092" cy="1494322"/>
           </a:xfrm>
           <a:prstGeom prst="rect">
             <a:avLst/>
@@ -10419,98 +10523,67 @@
           <a:lstStyle/>
           <a:p>
             <a:pPr algn="l">
-              <a:buNone/>
-            </a:pPr>
-            <a:r>
-              <a:rPr lang="en-US" sz="2200" b="1" dirty="0">
-                <a:solidFill>
-                  <a:srgbClr val="C8A951"/>
-                </a:solidFill>
-              </a:rPr>
-              <a:t>RQ1</a:t>
-            </a:r>
-          </a:p>
-        </p:txBody>
-      </p:sp>
-      <p:sp>
-        <p:nvSpPr>
-          <p:cNvPr id="110" name="RQ1Text"/>
-          <p:cNvSpPr txBox="1"/>
-          <p:nvPr/>
-        </p:nvSpPr>
-        <p:spPr>
-          <a:xfrm>
-            <a:off x="985519" y="2108200"/>
-            <a:ext cx="4805680" cy="1066800"/>
-          </a:xfrm>
-          <a:prstGeom prst="rect">
-            <a:avLst/>
-          </a:prstGeom>
-          <a:noFill/>
-        </p:spPr>
-        <p:txBody>
-          <a:bodyPr wrap="square" lIns="0" tIns="0" rIns="0" bIns="0" anchor="t"/>
-          <a:lstStyle/>
-          <a:p>
-            <a:pPr algn="l">
-              <a:buNone/>
-            </a:pPr>
-            <a:r>
-              <a:rPr lang="id-ID" sz="1600" dirty="0">
+              <a:lnSpc>
+                <a:spcPct val="110000"/>
+              </a:lnSpc>
+              <a:buNone/>
+            </a:pPr>
+            <a:r>
+              <a:rPr lang="id-ID" sz="1300" dirty="0">
                 <a:solidFill>
                   <a:srgbClr val="1F4E79"/>
                 </a:solidFill>
               </a:rPr>
-              <a:t>Seberapa stabil hierarki relatif 41 kabupaten/kota selama 2020–2024 di tengah goncangan pandemi?</a:t>
-            </a:r>
-          </a:p>
-        </p:txBody>
-      </p:sp>
-      <p:sp>
-        <p:nvSpPr>
-          <p:cNvPr id="111" name="RQ2Bg"/>
-          <p:cNvSpPr/>
-          <p:nvPr/>
-        </p:nvSpPr>
-        <p:spPr>
-          <a:xfrm>
-            <a:off x="6248400" y="1524000"/>
-            <a:ext cx="5486400" cy="1778000"/>
-          </a:xfrm>
-          <a:prstGeom prst="rect">
-            <a:avLst/>
-          </a:prstGeom>
-          <a:solidFill>
-            <a:srgbClr val="F7F4ED"/>
+              <a:t>Bagaimana karakteristik struktur kompromi 11 indikator pembangunan dengan metode STATIS?</a:t>
+            </a:r>
+          </a:p>
+        </p:txBody>
+      </p:sp>
+      <p:sp>
+        <p:nvSpPr>
+          <p:cNvPr id="210" name="Card210Bg"/>
+          <p:cNvSpPr/>
+          <p:nvPr/>
+        </p:nvSpPr>
+        <p:spPr>
+          <a:xfrm>
+            <a:off x="2895600" y="1524000"/>
+            <a:ext cx="1756229" cy="2057400"/>
+          </a:xfrm>
+          <a:prstGeom prst="rect">
+            <a:avLst/>
+          </a:prstGeom>
+          <a:solidFill>
+            <a:srgbClr val="F2EEE6"/>
           </a:solidFill>
           <a:ln>
             <a:noFill/>
           </a:ln>
         </p:spPr>
         <p:txBody>
-          <a:bodyPr/>
-          <a:lstStyle/>
-          <a:p>
-            <a:endParaRPr/>
-          </a:p>
-        </p:txBody>
-      </p:sp>
-      <p:sp>
-        <p:nvSpPr>
-          <p:cNvPr id="112" name="RQ2Edge"/>
-          <p:cNvSpPr/>
-          <p:nvPr/>
-        </p:nvSpPr>
-        <p:spPr>
-          <a:xfrm>
-            <a:off x="6248400" y="1524000"/>
-            <a:ext cx="63500" cy="1778000"/>
-          </a:xfrm>
-          <a:prstGeom prst="rect">
-            <a:avLst/>
-          </a:prstGeom>
-          <a:solidFill>
-            <a:srgbClr val="003366"/>
+          <a:bodyPr wrap="square" anchor="t"/>
+          <a:lstStyle/>
+          <a:p>
+            <a:endParaRPr lang="en-US"/>
+          </a:p>
+        </p:txBody>
+      </p:sp>
+      <p:sp>
+        <p:nvSpPr>
+          <p:cNvPr id="211" name="Card210Edge"/>
+          <p:cNvSpPr/>
+          <p:nvPr/>
+        </p:nvSpPr>
+        <p:spPr>
+          <a:xfrm>
+            <a:off x="2895600" y="1524000"/>
+            <a:ext cx="45719" cy="2057400"/>
+          </a:xfrm>
+          <a:prstGeom prst="rect">
+            <a:avLst/>
+          </a:prstGeom>
+          <a:solidFill>
+            <a:srgbClr val="C8A951"/>
           </a:solidFill>
           <a:ln>
             <a:noFill/>
@@ -10520,20 +10593,56 @@
           <a:bodyPr/>
           <a:lstStyle/>
           <a:p>
-            <a:endParaRPr/>
-          </a:p>
-        </p:txBody>
-      </p:sp>
-      <p:sp>
-        <p:nvSpPr>
-          <p:cNvPr id="113" name="RQ2Num"/>
-          <p:cNvSpPr txBox="1"/>
-          <p:nvPr/>
-        </p:nvSpPr>
-        <p:spPr>
-          <a:xfrm>
-            <a:off x="6477000" y="1676400"/>
-            <a:ext cx="635000" cy="381000"/>
+            <a:endParaRPr lang="en-US"/>
+          </a:p>
+        </p:txBody>
+      </p:sp>
+      <p:sp>
+        <p:nvSpPr>
+          <p:cNvPr id="212" name="Card210Num"/>
+          <p:cNvSpPr txBox="1"/>
+          <p:nvPr/>
+        </p:nvSpPr>
+        <p:spPr>
+          <a:xfrm>
+            <a:off x="3048000" y="1651000"/>
+            <a:ext cx="1600120" cy="276999"/>
+          </a:xfrm>
+          <a:prstGeom prst="rect">
+            <a:avLst/>
+          </a:prstGeom>
+          <a:noFill/>
+        </p:spPr>
+        <p:txBody>
+          <a:bodyPr wrap="square" lIns="0" tIns="0" rIns="0" bIns="0" anchor="t">
+            <a:spAutoFit/>
+          </a:bodyPr>
+          <a:lstStyle/>
+          <a:p>
+            <a:pPr algn="l">
+              <a:buNone/>
+            </a:pPr>
+            <a:r>
+              <a:rPr lang="en-US" sz="1800" b="1" dirty="0">
+                <a:solidFill>
+                  <a:srgbClr val="C8A951"/>
+                </a:solidFill>
+              </a:rPr>
+              <a:t>RQ2</a:t>
+            </a:r>
+          </a:p>
+        </p:txBody>
+      </p:sp>
+      <p:sp>
+        <p:nvSpPr>
+          <p:cNvPr id="213" name="Card210Text"/>
+          <p:cNvSpPr txBox="1"/>
+          <p:nvPr/>
+        </p:nvSpPr>
+        <p:spPr>
+          <a:xfrm>
+            <a:off x="3048000" y="2082800"/>
+            <a:ext cx="1561092" cy="1494322"/>
           </a:xfrm>
           <a:prstGeom prst="rect">
             <a:avLst/>
@@ -10545,200 +10654,67 @@
           <a:lstStyle/>
           <a:p>
             <a:pPr algn="l">
-              <a:buNone/>
-            </a:pPr>
-            <a:r>
-              <a:rPr lang="en-US" sz="2200" b="1" dirty="0">
-                <a:solidFill>
-                  <a:srgbClr val="C8A951"/>
-                </a:solidFill>
-              </a:rPr>
-              <a:t>RQ2</a:t>
-            </a:r>
-          </a:p>
-        </p:txBody>
-      </p:sp>
-      <p:sp>
-        <p:nvSpPr>
-          <p:cNvPr id="114" name="RQ2Text"/>
-          <p:cNvSpPr txBox="1"/>
-          <p:nvPr/>
-        </p:nvSpPr>
-        <p:spPr>
-          <a:xfrm>
-            <a:off x="6477000" y="2108200"/>
-            <a:ext cx="5105400" cy="1066800"/>
-          </a:xfrm>
-          <a:prstGeom prst="rect">
-            <a:avLst/>
-          </a:prstGeom>
-          <a:noFill/>
-        </p:spPr>
-        <p:txBody>
-          <a:bodyPr wrap="square" lIns="0" tIns="0" rIns="0" bIns="0" anchor="t"/>
-          <a:lstStyle/>
-          <a:p>
-            <a:pPr algn="l">
-              <a:buNone/>
-            </a:pPr>
-            <a:r>
-              <a:rPr lang="id-ID" sz="1600" dirty="0">
+              <a:lnSpc>
+                <a:spcPct val="110000"/>
+              </a:lnSpc>
+              <a:buNone/>
+            </a:pPr>
+            <a:r>
+              <a:rPr lang="id-ID" sz="1300" dirty="0">
                 <a:solidFill>
                   <a:srgbClr val="1F4E79"/>
                 </a:solidFill>
               </a:rPr>
-              <a:t>Bagaimana pola trajektori spasio-temporal saat dianalisis bersamaan lintas indikator dan tahun?</a:t>
-            </a:r>
-          </a:p>
-        </p:txBody>
-      </p:sp>
-      <p:sp>
-        <p:nvSpPr>
-          <p:cNvPr id="115" name="ObjHeader"/>
-          <p:cNvSpPr txBox="1"/>
-          <p:nvPr/>
-        </p:nvSpPr>
-        <p:spPr>
-          <a:xfrm>
-            <a:off x="731520" y="3581400"/>
-            <a:ext cx="10901680" cy="381000"/>
-          </a:xfrm>
-          <a:prstGeom prst="rect">
-            <a:avLst/>
-          </a:prstGeom>
-          <a:noFill/>
-        </p:spPr>
-        <p:txBody>
-          <a:bodyPr wrap="square" lIns="0" tIns="0" rIns="0" bIns="0" anchor="t"/>
-          <a:lstStyle/>
-          <a:p>
-            <a:pPr algn="l">
-              <a:buNone/>
-            </a:pPr>
-            <a:r>
-              <a:rPr lang="id-ID" sz="1500" b="1" dirty="0">
-                <a:solidFill>
-                  <a:srgbClr val="C8A951"/>
-                </a:solidFill>
-              </a:rPr>
-              <a:t>TUJUAN PENELITIAN</a:t>
-            </a:r>
-          </a:p>
-        </p:txBody>
-      </p:sp>
-      <p:sp>
-        <p:nvSpPr>
-          <p:cNvPr id="116" name="Obj1Bg"/>
-          <p:cNvSpPr/>
-          <p:nvPr/>
-        </p:nvSpPr>
-        <p:spPr>
-          <a:xfrm>
-            <a:off x="501650" y="4038600"/>
-            <a:ext cx="3619500" cy="2222500"/>
-          </a:xfrm>
-          <a:prstGeom prst="rect">
-            <a:avLst/>
-          </a:prstGeom>
-          <a:solidFill>
-            <a:srgbClr val="003366"/>
+              <a:t>Bagaimana uji permutasi matriks inter-struktur membuktikan dinamika temporal 2020–2024?</a:t>
+            </a:r>
+          </a:p>
+        </p:txBody>
+      </p:sp>
+      <p:sp>
+        <p:nvSpPr>
+          <p:cNvPr id="220" name="Card220Bg"/>
+          <p:cNvSpPr/>
+          <p:nvPr/>
+        </p:nvSpPr>
+        <p:spPr>
+          <a:xfrm>
+            <a:off x="5283200" y="1524000"/>
+            <a:ext cx="1756229" cy="2057400"/>
+          </a:xfrm>
+          <a:prstGeom prst="rect">
+            <a:avLst/>
+          </a:prstGeom>
+          <a:solidFill>
+            <a:srgbClr val="F2EEE6"/>
           </a:solidFill>
           <a:ln>
             <a:noFill/>
           </a:ln>
         </p:spPr>
         <p:txBody>
-          <a:bodyPr/>
-          <a:lstStyle/>
-          <a:p>
-            <a:endParaRPr/>
-          </a:p>
-        </p:txBody>
-      </p:sp>
-      <p:sp>
-        <p:nvSpPr>
-          <p:cNvPr id="117" name="Obj1Num"/>
-          <p:cNvSpPr txBox="1"/>
-          <p:nvPr/>
-        </p:nvSpPr>
-        <p:spPr>
-          <a:xfrm>
-            <a:off x="730250" y="4216400"/>
-            <a:ext cx="635000" cy="355600"/>
-          </a:xfrm>
-          <a:prstGeom prst="rect">
-            <a:avLst/>
-          </a:prstGeom>
-          <a:noFill/>
-        </p:spPr>
-        <p:txBody>
-          <a:bodyPr wrap="square" lIns="0" tIns="0" rIns="0" bIns="0" anchor="t"/>
-          <a:lstStyle/>
-          <a:p>
-            <a:pPr algn="l">
-              <a:buNone/>
-            </a:pPr>
-            <a:r>
-              <a:rPr lang="en-US" sz="2200" b="1" dirty="0">
-                <a:solidFill>
-                  <a:srgbClr val="C8A951"/>
-                </a:solidFill>
-              </a:rPr>
-              <a:t>1</a:t>
-            </a:r>
-          </a:p>
-        </p:txBody>
-      </p:sp>
-      <p:sp>
-        <p:nvSpPr>
-          <p:cNvPr id="118" name="Obj1Text"/>
-          <p:cNvSpPr txBox="1"/>
-          <p:nvPr/>
-        </p:nvSpPr>
-        <p:spPr>
-          <a:xfrm>
-            <a:off x="730250" y="4648200"/>
-            <a:ext cx="3238500" cy="1485900"/>
-          </a:xfrm>
-          <a:prstGeom prst="rect">
-            <a:avLst/>
-          </a:prstGeom>
-          <a:noFill/>
-        </p:spPr>
-        <p:txBody>
-          <a:bodyPr wrap="square" lIns="0" tIns="0" rIns="0" bIns="0" anchor="t"/>
-          <a:lstStyle/>
-          <a:p>
-            <a:pPr algn="l">
-              <a:buNone/>
-            </a:pPr>
-            <a:r>
-              <a:rPr lang="id-ID" sz="1600" dirty="0">
-                <a:solidFill>
-                  <a:srgbClr val="99CCFF"/>
-                </a:solidFill>
-              </a:rPr>
-              <a:t>Mengevaluasi stabilitas longitudinal melalui koefisien RV lintas tahun 2020–2024.</a:t>
-            </a:r>
-          </a:p>
-        </p:txBody>
-      </p:sp>
-      <p:sp>
-        <p:nvSpPr>
-          <p:cNvPr id="119" name="Obj2Bg"/>
-          <p:cNvSpPr/>
-          <p:nvPr/>
-        </p:nvSpPr>
-        <p:spPr>
-          <a:xfrm>
-            <a:off x="4286250" y="4038600"/>
-            <a:ext cx="3619500" cy="2222500"/>
-          </a:xfrm>
-          <a:prstGeom prst="rect">
-            <a:avLst/>
-          </a:prstGeom>
-          <a:solidFill>
-            <a:srgbClr val="003366"/>
+          <a:bodyPr wrap="square" anchor="t"/>
+          <a:lstStyle/>
+          <a:p>
+            <a:endParaRPr lang="en-US"/>
+          </a:p>
+        </p:txBody>
+      </p:sp>
+      <p:sp>
+        <p:nvSpPr>
+          <p:cNvPr id="221" name="Card220Edge"/>
+          <p:cNvSpPr/>
+          <p:nvPr/>
+        </p:nvSpPr>
+        <p:spPr>
+          <a:xfrm>
+            <a:off x="5283200" y="1524000"/>
+            <a:ext cx="45719" cy="2057400"/>
+          </a:xfrm>
+          <a:prstGeom prst="rect">
+            <a:avLst/>
+          </a:prstGeom>
+          <a:solidFill>
+            <a:srgbClr val="C8A951"/>
           </a:solidFill>
           <a:ln>
             <a:noFill/>
@@ -10748,20 +10724,56 @@
           <a:bodyPr/>
           <a:lstStyle/>
           <a:p>
-            <a:endParaRPr/>
-          </a:p>
-        </p:txBody>
-      </p:sp>
-      <p:sp>
-        <p:nvSpPr>
-          <p:cNvPr id="120" name="Obj2Num"/>
-          <p:cNvSpPr txBox="1"/>
-          <p:nvPr/>
-        </p:nvSpPr>
-        <p:spPr>
-          <a:xfrm>
-            <a:off x="4514850" y="4216400"/>
-            <a:ext cx="635000" cy="355600"/>
+            <a:endParaRPr lang="en-US"/>
+          </a:p>
+        </p:txBody>
+      </p:sp>
+      <p:sp>
+        <p:nvSpPr>
+          <p:cNvPr id="222" name="Card220Num"/>
+          <p:cNvSpPr txBox="1"/>
+          <p:nvPr/>
+        </p:nvSpPr>
+        <p:spPr>
+          <a:xfrm>
+            <a:off x="5435600" y="1651000"/>
+            <a:ext cx="1600120" cy="276999"/>
+          </a:xfrm>
+          <a:prstGeom prst="rect">
+            <a:avLst/>
+          </a:prstGeom>
+          <a:noFill/>
+        </p:spPr>
+        <p:txBody>
+          <a:bodyPr wrap="square" lIns="0" tIns="0" rIns="0" bIns="0" anchor="t">
+            <a:spAutoFit/>
+          </a:bodyPr>
+          <a:lstStyle/>
+          <a:p>
+            <a:pPr algn="l">
+              <a:buNone/>
+            </a:pPr>
+            <a:r>
+              <a:rPr lang="en-US" sz="1800" b="1" dirty="0">
+                <a:solidFill>
+                  <a:srgbClr val="C8A951"/>
+                </a:solidFill>
+              </a:rPr>
+              <a:t>RQ3</a:t>
+            </a:r>
+          </a:p>
+        </p:txBody>
+      </p:sp>
+      <p:sp>
+        <p:nvSpPr>
+          <p:cNvPr id="223" name="Card220Text"/>
+          <p:cNvSpPr txBox="1"/>
+          <p:nvPr/>
+        </p:nvSpPr>
+        <p:spPr>
+          <a:xfrm>
+            <a:off x="5435600" y="2082800"/>
+            <a:ext cx="1561092" cy="1494322"/>
           </a:xfrm>
           <a:prstGeom prst="rect">
             <a:avLst/>
@@ -10773,92 +10785,126 @@
           <a:lstStyle/>
           <a:p>
             <a:pPr algn="l">
-              <a:buNone/>
-            </a:pPr>
-            <a:r>
-              <a:rPr lang="en-US" sz="2200" b="1" dirty="0">
-                <a:solidFill>
-                  <a:srgbClr val="C8A951"/>
-                </a:solidFill>
-              </a:rPr>
-              <a:t>2</a:t>
-            </a:r>
-          </a:p>
-        </p:txBody>
-      </p:sp>
-      <p:sp>
-        <p:nvSpPr>
-          <p:cNvPr id="121" name="Obj2Text"/>
-          <p:cNvSpPr txBox="1"/>
-          <p:nvPr/>
-        </p:nvSpPr>
-        <p:spPr>
-          <a:xfrm>
-            <a:off x="4514850" y="4648200"/>
-            <a:ext cx="3238500" cy="1485900"/>
-          </a:xfrm>
-          <a:prstGeom prst="rect">
-            <a:avLst/>
-          </a:prstGeom>
-          <a:noFill/>
-        </p:spPr>
-        <p:txBody>
-          <a:bodyPr wrap="square" lIns="0" tIns="0" rIns="0" bIns="0" anchor="t"/>
-          <a:lstStyle/>
-          <a:p>
-            <a:pPr algn="l">
-              <a:buNone/>
-            </a:pPr>
-            <a:r>
-              <a:rPr lang="id-ID" sz="1600" dirty="0">
-                <a:solidFill>
-                  <a:srgbClr val="99CCFF"/>
-                </a:solidFill>
-              </a:rPr>
-              <a:t>Memetakan trajektori spasio-temporal menggunakan Dynamic Biplot.</a:t>
-            </a:r>
-          </a:p>
-        </p:txBody>
-      </p:sp>
-      <p:sp>
-        <p:nvSpPr>
-          <p:cNvPr id="122" name="Obj3Bg"/>
-          <p:cNvSpPr/>
-          <p:nvPr/>
-        </p:nvSpPr>
-        <p:spPr>
-          <a:xfrm>
-            <a:off x="8070850" y="4038600"/>
-            <a:ext cx="3619500" cy="2222500"/>
-          </a:xfrm>
-          <a:prstGeom prst="rect">
-            <a:avLst/>
-          </a:prstGeom>
-          <a:solidFill>
-            <a:srgbClr val="003366"/>
+              <a:lnSpc>
+                <a:spcPct val="110000"/>
+              </a:lnSpc>
+              <a:buNone/>
+            </a:pPr>
+            <a:r>
+              <a:rPr lang="id-ID" sz="1300" dirty="0">
+                <a:solidFill>
+                  <a:srgbClr val="1F4E79"/>
+                </a:solidFill>
+              </a:rPr>
+              <a:t>Bagaimana pola lintasan (trajectory) kabupaten/kota dari pandemi (2020) hingga pemulihan (2024) lewat Dynamic Biplot?</a:t>
+            </a:r>
+          </a:p>
+        </p:txBody>
+      </p:sp>
+      <p:sp>
+        <p:nvSpPr>
+          <p:cNvPr id="230" name="Card230Bg"/>
+          <p:cNvSpPr/>
+          <p:nvPr/>
+        </p:nvSpPr>
+        <p:spPr>
+          <a:xfrm>
+            <a:off x="7670800" y="1524000"/>
+            <a:ext cx="1756229" cy="2057400"/>
+          </a:xfrm>
+          <a:prstGeom prst="rect">
+            <a:avLst/>
+          </a:prstGeom>
+          <a:solidFill>
+            <a:srgbClr val="F2EEE6"/>
           </a:solidFill>
           <a:ln>
             <a:noFill/>
           </a:ln>
         </p:spPr>
         <p:txBody>
-          <a:bodyPr/>
-          <a:lstStyle/>
-          <a:p>
-            <a:endParaRPr/>
-          </a:p>
-        </p:txBody>
-      </p:sp>
-      <p:sp>
-        <p:nvSpPr>
-          <p:cNvPr id="123" name="Obj3Num"/>
-          <p:cNvSpPr txBox="1"/>
-          <p:nvPr/>
-        </p:nvSpPr>
-        <p:spPr>
-          <a:xfrm>
-            <a:off x="8299450" y="4216400"/>
-            <a:ext cx="635000" cy="355600"/>
+          <a:bodyPr wrap="square" anchor="t"/>
+          <a:lstStyle/>
+          <a:p>
+            <a:endParaRPr lang="en-US"/>
+          </a:p>
+        </p:txBody>
+      </p:sp>
+      <p:sp>
+        <p:nvSpPr>
+          <p:cNvPr id="231" name="Card230Edge"/>
+          <p:cNvSpPr/>
+          <p:nvPr/>
+        </p:nvSpPr>
+        <p:spPr>
+          <a:xfrm>
+            <a:off x="7670800" y="1524000"/>
+            <a:ext cx="45719" cy="2057400"/>
+          </a:xfrm>
+          <a:prstGeom prst="rect">
+            <a:avLst/>
+          </a:prstGeom>
+          <a:solidFill>
+            <a:srgbClr val="C8A951"/>
+          </a:solidFill>
+          <a:ln>
+            <a:noFill/>
+          </a:ln>
+        </p:spPr>
+        <p:txBody>
+          <a:bodyPr/>
+          <a:lstStyle/>
+          <a:p>
+            <a:endParaRPr lang="en-US"/>
+          </a:p>
+        </p:txBody>
+      </p:sp>
+      <p:sp>
+        <p:nvSpPr>
+          <p:cNvPr id="232" name="Card230Num"/>
+          <p:cNvSpPr txBox="1"/>
+          <p:nvPr/>
+        </p:nvSpPr>
+        <p:spPr>
+          <a:xfrm>
+            <a:off x="7823200" y="1651000"/>
+            <a:ext cx="1600120" cy="276999"/>
+          </a:xfrm>
+          <a:prstGeom prst="rect">
+            <a:avLst/>
+          </a:prstGeom>
+          <a:noFill/>
+        </p:spPr>
+        <p:txBody>
+          <a:bodyPr wrap="square" lIns="0" tIns="0" rIns="0" bIns="0" anchor="t">
+            <a:spAutoFit/>
+          </a:bodyPr>
+          <a:lstStyle/>
+          <a:p>
+            <a:pPr algn="l">
+              <a:buNone/>
+            </a:pPr>
+            <a:r>
+              <a:rPr lang="en-US" sz="1800" b="1" dirty="0">
+                <a:solidFill>
+                  <a:srgbClr val="C8A951"/>
+                </a:solidFill>
+              </a:rPr>
+              <a:t>RQ4</a:t>
+            </a:r>
+          </a:p>
+        </p:txBody>
+      </p:sp>
+      <p:sp>
+        <p:nvSpPr>
+          <p:cNvPr id="233" name="Card230Text"/>
+          <p:cNvSpPr txBox="1"/>
+          <p:nvPr/>
+        </p:nvSpPr>
+        <p:spPr>
+          <a:xfrm>
+            <a:off x="7823200" y="2082800"/>
+            <a:ext cx="1561092" cy="1494322"/>
           </a:xfrm>
           <a:prstGeom prst="rect">
             <a:avLst/>
@@ -10870,14 +10916,504 @@
           <a:lstStyle/>
           <a:p>
             <a:pPr algn="l">
-              <a:buNone/>
-            </a:pPr>
-            <a:r>
-              <a:rPr lang="en-US" sz="2200" b="1" dirty="0">
+              <a:lnSpc>
+                <a:spcPct val="110000"/>
+              </a:lnSpc>
+              <a:buNone/>
+            </a:pPr>
+            <a:r>
+              <a:rPr lang="id-ID" sz="1300" dirty="0">
+                <a:solidFill>
+                  <a:srgbClr val="1F4E79"/>
+                </a:solidFill>
+              </a:rPr>
+              <a:t>Bagaimana pola pengelompokan spasial tahunan serta dinamika transisi antar klaster?</a:t>
+            </a:r>
+          </a:p>
+        </p:txBody>
+      </p:sp>
+      <p:sp>
+        <p:nvSpPr>
+          <p:cNvPr id="240" name="Card240Bg"/>
+          <p:cNvSpPr/>
+          <p:nvPr/>
+        </p:nvSpPr>
+        <p:spPr>
+          <a:xfrm>
+            <a:off x="10058400" y="1524000"/>
+            <a:ext cx="1756229" cy="2057400"/>
+          </a:xfrm>
+          <a:prstGeom prst="rect">
+            <a:avLst/>
+          </a:prstGeom>
+          <a:solidFill>
+            <a:srgbClr val="F2EEE6"/>
+          </a:solidFill>
+          <a:ln>
+            <a:noFill/>
+          </a:ln>
+        </p:spPr>
+        <p:txBody>
+          <a:bodyPr wrap="square" anchor="t"/>
+          <a:lstStyle/>
+          <a:p>
+            <a:endParaRPr lang="en-US"/>
+          </a:p>
+        </p:txBody>
+      </p:sp>
+      <p:sp>
+        <p:nvSpPr>
+          <p:cNvPr id="241" name="Card240Edge"/>
+          <p:cNvSpPr/>
+          <p:nvPr/>
+        </p:nvSpPr>
+        <p:spPr>
+          <a:xfrm>
+            <a:off x="10058400" y="1524000"/>
+            <a:ext cx="45719" cy="2057400"/>
+          </a:xfrm>
+          <a:prstGeom prst="rect">
+            <a:avLst/>
+          </a:prstGeom>
+          <a:solidFill>
+            <a:srgbClr val="C8A951"/>
+          </a:solidFill>
+          <a:ln>
+            <a:noFill/>
+          </a:ln>
+        </p:spPr>
+        <p:txBody>
+          <a:bodyPr/>
+          <a:lstStyle/>
+          <a:p>
+            <a:endParaRPr lang="en-US"/>
+          </a:p>
+        </p:txBody>
+      </p:sp>
+      <p:sp>
+        <p:nvSpPr>
+          <p:cNvPr id="242" name="Card240Num"/>
+          <p:cNvSpPr txBox="1"/>
+          <p:nvPr/>
+        </p:nvSpPr>
+        <p:spPr>
+          <a:xfrm>
+            <a:off x="10210800" y="1651000"/>
+            <a:ext cx="1600120" cy="276999"/>
+          </a:xfrm>
+          <a:prstGeom prst="rect">
+            <a:avLst/>
+          </a:prstGeom>
+          <a:noFill/>
+        </p:spPr>
+        <p:txBody>
+          <a:bodyPr wrap="square" lIns="0" tIns="0" rIns="0" bIns="0" anchor="t">
+            <a:spAutoFit/>
+          </a:bodyPr>
+          <a:lstStyle/>
+          <a:p>
+            <a:pPr algn="l">
+              <a:buNone/>
+            </a:pPr>
+            <a:r>
+              <a:rPr lang="en-US" sz="1800" b="1" dirty="0">
                 <a:solidFill>
                   <a:srgbClr val="C8A951"/>
                 </a:solidFill>
               </a:rPr>
+              <a:t>RQ5</a:t>
+            </a:r>
+          </a:p>
+        </p:txBody>
+      </p:sp>
+      <p:sp>
+        <p:nvSpPr>
+          <p:cNvPr id="243" name="Card240Text"/>
+          <p:cNvSpPr txBox="1"/>
+          <p:nvPr/>
+        </p:nvSpPr>
+        <p:spPr>
+          <a:xfrm>
+            <a:off x="10210800" y="2082800"/>
+            <a:ext cx="1561092" cy="1494322"/>
+          </a:xfrm>
+          <a:prstGeom prst="rect">
+            <a:avLst/>
+          </a:prstGeom>
+          <a:noFill/>
+        </p:spPr>
+        <p:txBody>
+          <a:bodyPr wrap="square" lIns="0" tIns="0" rIns="0" bIns="0" anchor="t"/>
+          <a:lstStyle/>
+          <a:p>
+            <a:pPr algn="l">
+              <a:lnSpc>
+                <a:spcPct val="110000"/>
+              </a:lnSpc>
+              <a:buNone/>
+            </a:pPr>
+            <a:r>
+              <a:rPr lang="id-ID" sz="1300" dirty="0">
+                <a:solidFill>
+                  <a:srgbClr val="1F4E79"/>
+                </a:solidFill>
+              </a:rPr>
+              <a:t>Bagaimana merancang aplikasi web (Dash &amp; Plotly) untuk eksplorasi indikator pembangunan secara interaktif?</a:t>
+            </a:r>
+          </a:p>
+        </p:txBody>
+      </p:sp>
+      <p:sp>
+        <p:nvSpPr>
+          <p:cNvPr id="250" name="Card250Bg"/>
+          <p:cNvSpPr/>
+          <p:nvPr/>
+        </p:nvSpPr>
+        <p:spPr>
+          <a:xfrm>
+            <a:off x="508000" y="4143828"/>
+            <a:ext cx="1752520" cy="2006600"/>
+          </a:xfrm>
+          <a:prstGeom prst="rect">
+            <a:avLst/>
+          </a:prstGeom>
+          <a:solidFill>
+            <a:srgbClr val="003366"/>
+          </a:solidFill>
+          <a:ln>
+            <a:noFill/>
+          </a:ln>
+        </p:spPr>
+        <p:txBody>
+          <a:bodyPr wrap="square" anchor="t"/>
+          <a:lstStyle/>
+          <a:p>
+            <a:endParaRPr lang="en-US"/>
+          </a:p>
+        </p:txBody>
+      </p:sp>
+      <p:sp>
+        <p:nvSpPr>
+          <p:cNvPr id="251" name="Card250Edge"/>
+          <p:cNvSpPr/>
+          <p:nvPr/>
+        </p:nvSpPr>
+        <p:spPr>
+          <a:xfrm>
+            <a:off x="508000" y="4143828"/>
+            <a:ext cx="45719" cy="2006600"/>
+          </a:xfrm>
+          <a:prstGeom prst="rect">
+            <a:avLst/>
+          </a:prstGeom>
+          <a:solidFill>
+            <a:srgbClr val="C8A951"/>
+          </a:solidFill>
+          <a:ln>
+            <a:noFill/>
+          </a:ln>
+        </p:spPr>
+        <p:txBody>
+          <a:bodyPr/>
+          <a:lstStyle/>
+          <a:p>
+            <a:endParaRPr lang="en-US"/>
+          </a:p>
+        </p:txBody>
+      </p:sp>
+      <p:sp>
+        <p:nvSpPr>
+          <p:cNvPr id="252" name="Card250Num"/>
+          <p:cNvSpPr txBox="1"/>
+          <p:nvPr/>
+        </p:nvSpPr>
+        <p:spPr>
+          <a:xfrm>
+            <a:off x="660400" y="4270828"/>
+            <a:ext cx="1596740" cy="276999"/>
+          </a:xfrm>
+          <a:prstGeom prst="rect">
+            <a:avLst/>
+          </a:prstGeom>
+          <a:noFill/>
+        </p:spPr>
+        <p:txBody>
+          <a:bodyPr wrap="square" lIns="0" tIns="0" rIns="0" bIns="0" anchor="t">
+            <a:spAutoFit/>
+          </a:bodyPr>
+          <a:lstStyle/>
+          <a:p>
+            <a:pPr algn="l">
+              <a:buNone/>
+            </a:pPr>
+            <a:r>
+              <a:rPr lang="en-US" sz="1800" b="1" dirty="0">
+                <a:solidFill>
+                  <a:srgbClr val="C8A951"/>
+                </a:solidFill>
+              </a:rPr>
+              <a:t>1</a:t>
+            </a:r>
+          </a:p>
+        </p:txBody>
+      </p:sp>
+      <p:sp>
+        <p:nvSpPr>
+          <p:cNvPr id="253" name="Card250Text"/>
+          <p:cNvSpPr txBox="1"/>
+          <p:nvPr/>
+        </p:nvSpPr>
+        <p:spPr>
+          <a:xfrm>
+            <a:off x="660400" y="4702628"/>
+            <a:ext cx="1557796" cy="1354455"/>
+          </a:xfrm>
+          <a:prstGeom prst="rect">
+            <a:avLst/>
+          </a:prstGeom>
+          <a:noFill/>
+        </p:spPr>
+        <p:txBody>
+          <a:bodyPr wrap="square" lIns="0" tIns="0" rIns="0" bIns="0" anchor="t"/>
+          <a:lstStyle/>
+          <a:p>
+            <a:pPr algn="l">
+              <a:lnSpc>
+                <a:spcPct val="110000"/>
+              </a:lnSpc>
+              <a:buNone/>
+            </a:pPr>
+            <a:r>
+              <a:rPr lang="id-ID" sz="1300" dirty="0">
+                <a:solidFill>
+                  <a:srgbClr val="FFFFFF"/>
+                </a:solidFill>
+              </a:rPr>
+              <a:t>Menganalisis struktur kompromi 11 indikator pembangunan menggunakan metode STATIS.</a:t>
+            </a:r>
+          </a:p>
+        </p:txBody>
+      </p:sp>
+      <p:sp>
+        <p:nvSpPr>
+          <p:cNvPr id="260" name="Card260Bg"/>
+          <p:cNvSpPr/>
+          <p:nvPr/>
+        </p:nvSpPr>
+        <p:spPr>
+          <a:xfrm>
+            <a:off x="2895600" y="4143828"/>
+            <a:ext cx="1752520" cy="2006600"/>
+          </a:xfrm>
+          <a:prstGeom prst="rect">
+            <a:avLst/>
+          </a:prstGeom>
+          <a:solidFill>
+            <a:srgbClr val="003366"/>
+          </a:solidFill>
+          <a:ln>
+            <a:noFill/>
+          </a:ln>
+        </p:spPr>
+        <p:txBody>
+          <a:bodyPr wrap="square" anchor="t"/>
+          <a:lstStyle/>
+          <a:p>
+            <a:endParaRPr lang="en-US"/>
+          </a:p>
+        </p:txBody>
+      </p:sp>
+      <p:sp>
+        <p:nvSpPr>
+          <p:cNvPr id="261" name="Card260Edge"/>
+          <p:cNvSpPr/>
+          <p:nvPr/>
+        </p:nvSpPr>
+        <p:spPr>
+          <a:xfrm>
+            <a:off x="2895600" y="4143828"/>
+            <a:ext cx="45719" cy="2006600"/>
+          </a:xfrm>
+          <a:prstGeom prst="rect">
+            <a:avLst/>
+          </a:prstGeom>
+          <a:solidFill>
+            <a:srgbClr val="C8A951"/>
+          </a:solidFill>
+          <a:ln>
+            <a:noFill/>
+          </a:ln>
+        </p:spPr>
+        <p:txBody>
+          <a:bodyPr/>
+          <a:lstStyle/>
+          <a:p>
+            <a:endParaRPr lang="en-US"/>
+          </a:p>
+        </p:txBody>
+      </p:sp>
+      <p:sp>
+        <p:nvSpPr>
+          <p:cNvPr id="262" name="Card260Num"/>
+          <p:cNvSpPr txBox="1"/>
+          <p:nvPr/>
+        </p:nvSpPr>
+        <p:spPr>
+          <a:xfrm>
+            <a:off x="3048000" y="4270828"/>
+            <a:ext cx="1596740" cy="276999"/>
+          </a:xfrm>
+          <a:prstGeom prst="rect">
+            <a:avLst/>
+          </a:prstGeom>
+          <a:noFill/>
+        </p:spPr>
+        <p:txBody>
+          <a:bodyPr wrap="square" lIns="0" tIns="0" rIns="0" bIns="0" anchor="t">
+            <a:spAutoFit/>
+          </a:bodyPr>
+          <a:lstStyle/>
+          <a:p>
+            <a:pPr algn="l">
+              <a:buNone/>
+            </a:pPr>
+            <a:r>
+              <a:rPr lang="en-US" sz="1800" b="1" dirty="0">
+                <a:solidFill>
+                  <a:srgbClr val="C8A951"/>
+                </a:solidFill>
+              </a:rPr>
+              <a:t>2</a:t>
+            </a:r>
+          </a:p>
+        </p:txBody>
+      </p:sp>
+      <p:sp>
+        <p:nvSpPr>
+          <p:cNvPr id="263" name="Card260Text"/>
+          <p:cNvSpPr txBox="1"/>
+          <p:nvPr/>
+        </p:nvSpPr>
+        <p:spPr>
+          <a:xfrm>
+            <a:off x="3048000" y="4702628"/>
+            <a:ext cx="1557796" cy="1354455"/>
+          </a:xfrm>
+          <a:prstGeom prst="rect">
+            <a:avLst/>
+          </a:prstGeom>
+          <a:noFill/>
+        </p:spPr>
+        <p:txBody>
+          <a:bodyPr wrap="square" lIns="0" tIns="0" rIns="0" bIns="0" anchor="t"/>
+          <a:lstStyle/>
+          <a:p>
+            <a:pPr algn="l">
+              <a:lnSpc>
+                <a:spcPct val="110000"/>
+              </a:lnSpc>
+              <a:buNone/>
+            </a:pPr>
+            <a:r>
+              <a:rPr lang="id-ID" sz="1300" dirty="0">
+                <a:solidFill>
+                  <a:srgbClr val="FFFFFF"/>
+                </a:solidFill>
+              </a:rPr>
+              <a:t>Menguji dinamika temporal antar-indikator 2020–2024 dengan uji permutasi matriks inter-struktur.</a:t>
+            </a:r>
+          </a:p>
+        </p:txBody>
+      </p:sp>
+      <p:sp>
+        <p:nvSpPr>
+          <p:cNvPr id="270" name="Card270Bg"/>
+          <p:cNvSpPr/>
+          <p:nvPr/>
+        </p:nvSpPr>
+        <p:spPr>
+          <a:xfrm>
+            <a:off x="5283200" y="4143828"/>
+            <a:ext cx="1752520" cy="2006600"/>
+          </a:xfrm>
+          <a:prstGeom prst="rect">
+            <a:avLst/>
+          </a:prstGeom>
+          <a:solidFill>
+            <a:srgbClr val="003366"/>
+          </a:solidFill>
+          <a:ln>
+            <a:noFill/>
+          </a:ln>
+        </p:spPr>
+        <p:txBody>
+          <a:bodyPr wrap="square" anchor="t"/>
+          <a:lstStyle/>
+          <a:p>
+            <a:endParaRPr lang="en-US"/>
+          </a:p>
+        </p:txBody>
+      </p:sp>
+      <p:sp>
+        <p:nvSpPr>
+          <p:cNvPr id="271" name="Card270Edge"/>
+          <p:cNvSpPr/>
+          <p:nvPr/>
+        </p:nvSpPr>
+        <p:spPr>
+          <a:xfrm>
+            <a:off x="5283200" y="4143828"/>
+            <a:ext cx="45719" cy="2006600"/>
+          </a:xfrm>
+          <a:prstGeom prst="rect">
+            <a:avLst/>
+          </a:prstGeom>
+          <a:solidFill>
+            <a:srgbClr val="C8A951"/>
+          </a:solidFill>
+          <a:ln>
+            <a:noFill/>
+          </a:ln>
+        </p:spPr>
+        <p:txBody>
+          <a:bodyPr/>
+          <a:lstStyle/>
+          <a:p>
+            <a:endParaRPr lang="en-US"/>
+          </a:p>
+        </p:txBody>
+      </p:sp>
+      <p:sp>
+        <p:nvSpPr>
+          <p:cNvPr id="272" name="Card270Num"/>
+          <p:cNvSpPr txBox="1"/>
+          <p:nvPr/>
+        </p:nvSpPr>
+        <p:spPr>
+          <a:xfrm>
+            <a:off x="5435600" y="4270828"/>
+            <a:ext cx="1596740" cy="276999"/>
+          </a:xfrm>
+          <a:prstGeom prst="rect">
+            <a:avLst/>
+          </a:prstGeom>
+          <a:noFill/>
+        </p:spPr>
+        <p:txBody>
+          <a:bodyPr wrap="square" lIns="0" tIns="0" rIns="0" bIns="0" anchor="t">
+            <a:spAutoFit/>
+          </a:bodyPr>
+          <a:lstStyle/>
+          <a:p>
+            <a:pPr algn="l">
+              <a:buNone/>
+            </a:pPr>
+            <a:r>
+              <a:rPr lang="en-US" sz="1800" b="1" dirty="0">
+                <a:solidFill>
+                  <a:srgbClr val="C8A951"/>
+                </a:solidFill>
+              </a:rPr>
               <a:t>3</a:t>
             </a:r>
           </a:p>
@@ -10885,14 +11421,14 @@
       </p:sp>
       <p:sp>
         <p:nvSpPr>
-          <p:cNvPr id="124" name="Obj3Text"/>
-          <p:cNvSpPr txBox="1"/>
-          <p:nvPr/>
-        </p:nvSpPr>
-        <p:spPr>
-          <a:xfrm>
-            <a:off x="8299450" y="4648200"/>
-            <a:ext cx="3238500" cy="1485900"/>
+          <p:cNvPr id="273" name="Card270Text"/>
+          <p:cNvSpPr txBox="1"/>
+          <p:nvPr/>
+        </p:nvSpPr>
+        <p:spPr>
+          <a:xfrm>
+            <a:off x="5435600" y="4702628"/>
+            <a:ext cx="1557796" cy="1354455"/>
           </a:xfrm>
           <a:prstGeom prst="rect">
             <a:avLst/>
@@ -10904,49 +11440,280 @@
           <a:lstStyle/>
           <a:p>
             <a:pPr algn="l">
-              <a:buNone/>
-            </a:pPr>
-            <a:r>
-              <a:rPr lang="id-ID" sz="1600" dirty="0">
-                <a:solidFill>
-                  <a:srgbClr val="99CCFF"/>
-                </a:solidFill>
-              </a:rPr>
-              <a:t>Mengelompokkan wilayah ke dalam klaster yang dapat diinterpretasi (k = 3).</a:t>
-            </a:r>
-          </a:p>
-        </p:txBody>
-      </p:sp>
-      <p:sp>
-        <p:nvSpPr>
-          <p:cNvPr id="103" name="PageNum"/>
-          <p:cNvSpPr txBox="1"/>
-          <p:nvPr/>
-        </p:nvSpPr>
-        <p:spPr>
-          <a:xfrm>
-            <a:off x="10541000" y="6540500"/>
-            <a:ext cx="1397000" cy="279400"/>
-          </a:xfrm>
-          <a:prstGeom prst="rect">
-            <a:avLst/>
-          </a:prstGeom>
-          <a:noFill/>
-        </p:spPr>
-        <p:txBody>
-          <a:bodyPr wrap="square" lIns="0" tIns="0" rIns="0" bIns="0" anchor="ctr" anchorCtr="0"/>
-          <a:lstStyle/>
-          <a:p>
-            <a:pPr algn="r">
-              <a:buNone/>
-            </a:pPr>
-            <a:r>
-              <a:rPr lang="en-US" sz="1200" dirty="0">
+              <a:lnSpc>
+                <a:spcPct val="110000"/>
+              </a:lnSpc>
+              <a:buNone/>
+            </a:pPr>
+            <a:r>
+              <a:rPr lang="id-ID" sz="1300" dirty="0">
+                <a:solidFill>
+                  <a:srgbClr val="FFFFFF"/>
+                </a:solidFill>
+              </a:rPr>
+              <a:t>Menganalisis pola lintasan ekonomi kabupaten/kota dari krisis (2020) ke pemulihan (2024) via Dynamic Biplot.</a:t>
+            </a:r>
+          </a:p>
+        </p:txBody>
+      </p:sp>
+      <p:sp>
+        <p:nvSpPr>
+          <p:cNvPr id="280" name="Card280Bg"/>
+          <p:cNvSpPr/>
+          <p:nvPr/>
+        </p:nvSpPr>
+        <p:spPr>
+          <a:xfrm>
+            <a:off x="7670800" y="4143828"/>
+            <a:ext cx="1752520" cy="2006600"/>
+          </a:xfrm>
+          <a:prstGeom prst="rect">
+            <a:avLst/>
+          </a:prstGeom>
+          <a:solidFill>
+            <a:srgbClr val="003366"/>
+          </a:solidFill>
+          <a:ln>
+            <a:noFill/>
+          </a:ln>
+        </p:spPr>
+        <p:txBody>
+          <a:bodyPr wrap="square" anchor="t"/>
+          <a:lstStyle/>
+          <a:p>
+            <a:endParaRPr lang="en-US"/>
+          </a:p>
+        </p:txBody>
+      </p:sp>
+      <p:sp>
+        <p:nvSpPr>
+          <p:cNvPr id="281" name="Card280Edge"/>
+          <p:cNvSpPr/>
+          <p:nvPr/>
+        </p:nvSpPr>
+        <p:spPr>
+          <a:xfrm>
+            <a:off x="7670800" y="4143828"/>
+            <a:ext cx="45719" cy="2006600"/>
+          </a:xfrm>
+          <a:prstGeom prst="rect">
+            <a:avLst/>
+          </a:prstGeom>
+          <a:solidFill>
+            <a:srgbClr val="C8A951"/>
+          </a:solidFill>
+          <a:ln>
+            <a:noFill/>
+          </a:ln>
+        </p:spPr>
+        <p:txBody>
+          <a:bodyPr/>
+          <a:lstStyle/>
+          <a:p>
+            <a:endParaRPr lang="en-US"/>
+          </a:p>
+        </p:txBody>
+      </p:sp>
+      <p:sp>
+        <p:nvSpPr>
+          <p:cNvPr id="282" name="Card280Num"/>
+          <p:cNvSpPr txBox="1"/>
+          <p:nvPr/>
+        </p:nvSpPr>
+        <p:spPr>
+          <a:xfrm>
+            <a:off x="7823200" y="4270828"/>
+            <a:ext cx="1596740" cy="276999"/>
+          </a:xfrm>
+          <a:prstGeom prst="rect">
+            <a:avLst/>
+          </a:prstGeom>
+          <a:noFill/>
+        </p:spPr>
+        <p:txBody>
+          <a:bodyPr wrap="square" lIns="0" tIns="0" rIns="0" bIns="0" anchor="t">
+            <a:spAutoFit/>
+          </a:bodyPr>
+          <a:lstStyle/>
+          <a:p>
+            <a:pPr algn="l">
+              <a:buNone/>
+            </a:pPr>
+            <a:r>
+              <a:rPr lang="en-US" sz="1800" b="1" dirty="0">
                 <a:solidFill>
                   <a:srgbClr val="C8A951"/>
                 </a:solidFill>
               </a:rPr>
-              <a:t>04 / 15</a:t>
+              <a:t>4</a:t>
+            </a:r>
+          </a:p>
+        </p:txBody>
+      </p:sp>
+      <p:sp>
+        <p:nvSpPr>
+          <p:cNvPr id="283" name="Card280Text"/>
+          <p:cNvSpPr txBox="1"/>
+          <p:nvPr/>
+        </p:nvSpPr>
+        <p:spPr>
+          <a:xfrm>
+            <a:off x="7823200" y="4702628"/>
+            <a:ext cx="1557796" cy="1354455"/>
+          </a:xfrm>
+          <a:prstGeom prst="rect">
+            <a:avLst/>
+          </a:prstGeom>
+          <a:noFill/>
+        </p:spPr>
+        <p:txBody>
+          <a:bodyPr wrap="square" lIns="0" tIns="0" rIns="0" bIns="0" anchor="t"/>
+          <a:lstStyle/>
+          <a:p>
+            <a:pPr algn="l">
+              <a:lnSpc>
+                <a:spcPct val="110000"/>
+              </a:lnSpc>
+              <a:buNone/>
+            </a:pPr>
+            <a:r>
+              <a:rPr lang="id-ID" sz="1300" dirty="0">
+                <a:solidFill>
+                  <a:srgbClr val="FFFFFF"/>
+                </a:solidFill>
+              </a:rPr>
+              <a:t>Mengidentifikasi pola klaster spasial tahunan dan dinamika transisi kabupaten/kota antar klaster.</a:t>
+            </a:r>
+          </a:p>
+        </p:txBody>
+      </p:sp>
+      <p:sp>
+        <p:nvSpPr>
+          <p:cNvPr id="290" name="Card290Bg"/>
+          <p:cNvSpPr/>
+          <p:nvPr/>
+        </p:nvSpPr>
+        <p:spPr>
+          <a:xfrm>
+            <a:off x="10058400" y="4143828"/>
+            <a:ext cx="1752520" cy="2006600"/>
+          </a:xfrm>
+          <a:prstGeom prst="rect">
+            <a:avLst/>
+          </a:prstGeom>
+          <a:solidFill>
+            <a:srgbClr val="003366"/>
+          </a:solidFill>
+          <a:ln>
+            <a:noFill/>
+          </a:ln>
+        </p:spPr>
+        <p:txBody>
+          <a:bodyPr wrap="square" anchor="t"/>
+          <a:lstStyle/>
+          <a:p>
+            <a:endParaRPr lang="en-US"/>
+          </a:p>
+        </p:txBody>
+      </p:sp>
+      <p:sp>
+        <p:nvSpPr>
+          <p:cNvPr id="291" name="Card290Edge"/>
+          <p:cNvSpPr/>
+          <p:nvPr/>
+        </p:nvSpPr>
+        <p:spPr>
+          <a:xfrm>
+            <a:off x="10058400" y="4143828"/>
+            <a:ext cx="45719" cy="2006600"/>
+          </a:xfrm>
+          <a:prstGeom prst="rect">
+            <a:avLst/>
+          </a:prstGeom>
+          <a:solidFill>
+            <a:srgbClr val="C8A951"/>
+          </a:solidFill>
+          <a:ln>
+            <a:noFill/>
+          </a:ln>
+        </p:spPr>
+        <p:txBody>
+          <a:bodyPr/>
+          <a:lstStyle/>
+          <a:p>
+            <a:endParaRPr lang="en-US"/>
+          </a:p>
+        </p:txBody>
+      </p:sp>
+      <p:sp>
+        <p:nvSpPr>
+          <p:cNvPr id="292" name="Card290Num"/>
+          <p:cNvSpPr txBox="1"/>
+          <p:nvPr/>
+        </p:nvSpPr>
+        <p:spPr>
+          <a:xfrm>
+            <a:off x="10210800" y="4270828"/>
+            <a:ext cx="1596740" cy="276999"/>
+          </a:xfrm>
+          <a:prstGeom prst="rect">
+            <a:avLst/>
+          </a:prstGeom>
+          <a:noFill/>
+        </p:spPr>
+        <p:txBody>
+          <a:bodyPr wrap="square" lIns="0" tIns="0" rIns="0" bIns="0" anchor="t">
+            <a:spAutoFit/>
+          </a:bodyPr>
+          <a:lstStyle/>
+          <a:p>
+            <a:pPr algn="l">
+              <a:buNone/>
+            </a:pPr>
+            <a:r>
+              <a:rPr lang="en-US" sz="1800" b="1" dirty="0">
+                <a:solidFill>
+                  <a:srgbClr val="C8A951"/>
+                </a:solidFill>
+              </a:rPr>
+              <a:t>5</a:t>
+            </a:r>
+          </a:p>
+        </p:txBody>
+      </p:sp>
+      <p:sp>
+        <p:nvSpPr>
+          <p:cNvPr id="293" name="Card290Text"/>
+          <p:cNvSpPr txBox="1"/>
+          <p:nvPr/>
+        </p:nvSpPr>
+        <p:spPr>
+          <a:xfrm>
+            <a:off x="10210800" y="4702628"/>
+            <a:ext cx="1557796" cy="1354455"/>
+          </a:xfrm>
+          <a:prstGeom prst="rect">
+            <a:avLst/>
+          </a:prstGeom>
+          <a:noFill/>
+        </p:spPr>
+        <p:txBody>
+          <a:bodyPr wrap="square" lIns="0" tIns="0" rIns="0" bIns="0" anchor="t"/>
+          <a:lstStyle/>
+          <a:p>
+            <a:pPr algn="l">
+              <a:lnSpc>
+                <a:spcPct val="110000"/>
+              </a:lnSpc>
+              <a:buNone/>
+            </a:pPr>
+            <a:r>
+              <a:rPr lang="id-ID" sz="1300" dirty="0">
+                <a:solidFill>
+                  <a:srgbClr val="FFFFFF"/>
+                </a:solidFill>
+              </a:rPr>
+              <a:t>Merancang aplikasi web berbasis Dash &amp; Plotly sebagai alat eksplorasi interaktif indikator pembangunan.</a:t>
             </a:r>
           </a:p>
         </p:txBody>
@@ -10954,7 +11721,7 @@
     </p:spTree>
     <p:extLst>
       <p:ext uri="{BB962C8B-B14F-4D97-AF65-F5344CB8AC3E}">
-        <p14:creationId xmlns:p14="http://schemas.microsoft.com/office/powerpoint/2010/main" val="3864854457"/>
+        <p14:creationId xmlns:p14="http://schemas.microsoft.com/office/powerpoint/2010/main" val="2458070214"/>
       </p:ext>
     </p:extLst>
   </p:cSld>
@@ -18730,7 +19497,7 @@
 
 <file path=ppt/webextensions/taskpanes.xml><?xml version="1.0" encoding="utf-8"?>
 <wetp:taskpanes xmlns:wetp="http://schemas.microsoft.com/office/webextensions/taskpanes/2010/11">
-  <wetp:taskpane dockstate="right" visibility="0" width="830" row="0">
+  <wetp:taskpane dockstate="right" visibility="0" width="350" row="0">
     <wetp:webextensionref xmlns:r="http://schemas.openxmlformats.org/officeDocument/2006/relationships" r:id="rId1"/>
   </wetp:taskpane>
 </wetp:taskpanes>
